--- a/docs/答辩PPT.pptx
+++ b/docs/答辩PPT.pptx
@@ -3983,6 +3983,41 @@
           </a:p>
         </p:txBody>
       </p:sp>
+      <p:sp>
+        <p:nvSpPr>
+          <p:cNvPr id="70" name="TextBox 69"/>
+          <p:cNvSpPr txBox="1"/>
+          <p:nvPr/>
+        </p:nvSpPr>
+        <p:spPr>
+          <a:xfrm>
+            <a:off x="914400" y="5486400"/>
+            <a:ext cx="10332720" cy="1097280"/>
+          </a:xfrm>
+          <a:prstGeom prst="rect">
+            <a:avLst/>
+          </a:prstGeom>
+          <a:noFill/>
+        </p:spPr>
+        <p:txBody>
+          <a:bodyPr wrap="square">
+            <a:spAutoFit/>
+          </a:bodyPr>
+          <a:lstStyle/>
+          <a:p>
+            <a:pPr algn="l">
+              <a:defRPr sz="1200">
+                <a:solidFill>
+                  <a:srgbClr val="666666"/>
+                </a:solidFill>
+              </a:defRPr>
+            </a:pPr>
+            <a:r>
+              <a:t>为什么 JWT + Redis 而非纯 JWT？纯 JWT 一经签发无法主动撤销，登出时令牌仍然有效。Redis 补充会话状态后，删除会话记录即可使令牌立即失效，兼顾了无状态校验的性能和主动撤销的能力。缓存策略采用写时淘汰，帖子列表缓存 2 分钟、详情缓存 5 分钟，冷启动 59ms 降至热缓存 15ms，提升 74.66%。</a:t>
+            </a:r>
+          </a:p>
+        </p:txBody>
+      </p:sp>
     </p:spTree>
   </p:cSld>
   <p:clrMapOvr>
@@ -5176,6 +5211,41 @@
           </a:p>
         </p:txBody>
       </p:sp>
+      <p:sp>
+        <p:nvSpPr>
+          <p:cNvPr id="46" name="TextBox 45"/>
+          <p:cNvSpPr txBox="1"/>
+          <p:nvPr/>
+        </p:nvSpPr>
+        <p:spPr>
+          <a:xfrm>
+            <a:off x="457200" y="5029200"/>
+            <a:ext cx="11247120" cy="1371600"/>
+          </a:xfrm>
+          <a:prstGeom prst="rect">
+            <a:avLst/>
+          </a:prstGeom>
+          <a:noFill/>
+        </p:spPr>
+        <p:txBody>
+          <a:bodyPr wrap="square">
+            <a:spAutoFit/>
+          </a:bodyPr>
+          <a:lstStyle/>
+          <a:p>
+            <a:pPr algn="l">
+              <a:defRPr sz="1100">
+                <a:solidFill>
+                  <a:srgbClr val="666666"/>
+                </a:solidFill>
+              </a:defRPr>
+            </a:pPr>
+            <a:r>
+              <a:t>测试意义：功能测试的 11 个场景覆盖了正常业务流程和 4 种异常路径（无令牌拦截、越权操作、并发重复点赞、登出后会话失效），验证了第三章需求分析和第四章安全设计中定义的行为。缓存基准测试量化了 Redis 对帖子列表接口的改善幅度。并发负载测试在 1000 用户下 QPS 仍保持 1450+，成功率 99.99%，说明系统在单机条件下已具备一定的承载能力。所有测试在本地单机完成，与生产环境存在差异，这一局限已在论文中说明。</a:t>
+            </a:r>
+          </a:p>
+        </p:txBody>
+      </p:sp>
     </p:spTree>
   </p:cSld>
   <p:clrMapOvr>
@@ -9096,6 +9166,41 @@
           </a:p>
         </p:txBody>
       </p:sp>
+      <p:sp>
+        <p:nvSpPr>
+          <p:cNvPr id="58" name="TextBox 57"/>
+          <p:cNvSpPr txBox="1"/>
+          <p:nvPr/>
+        </p:nvSpPr>
+        <p:spPr>
+          <a:xfrm>
+            <a:off x="914400" y="5303520"/>
+            <a:ext cx="10332720" cy="1097280"/>
+          </a:xfrm>
+          <a:prstGeom prst="rect">
+            <a:avLst/>
+          </a:prstGeom>
+          <a:noFill/>
+        </p:spPr>
+        <p:txBody>
+          <a:bodyPr wrap="square">
+            <a:spAutoFit/>
+          </a:bodyPr>
+          <a:lstStyle/>
+          <a:p>
+            <a:pPr algn="l">
+              <a:defRPr sz="1200">
+                <a:solidFill>
+                  <a:srgbClr val="666666"/>
+                </a:solidFill>
+              </a:defRPr>
+            </a:pPr>
+            <a:r>
+              <a:t>设计思路：系统不区分学生/教师角色，所有注册用户享有相同权限，编辑和删除仅限内容作者。这一简化的权限模型降低了系统复杂度，对高校论坛这类用户角色差异不大的场景是合理的取舍。非功能性需求的五个维度直接对应了后续的架构决策和测试方案。</a:t>
+            </a:r>
+          </a:p>
+        </p:txBody>
+      </p:sp>
     </p:spTree>
   </p:cSld>
   <p:clrMapOvr>
@@ -10248,6 +10353,41 @@
           </a:p>
         </p:txBody>
       </p:sp>
+      <p:sp>
+        <p:nvSpPr>
+          <p:cNvPr id="34" name="TextBox 33"/>
+          <p:cNvSpPr txBox="1"/>
+          <p:nvPr/>
+        </p:nvSpPr>
+        <p:spPr>
+          <a:xfrm>
+            <a:off x="914400" y="5669280"/>
+            <a:ext cx="10332720" cy="914400"/>
+          </a:xfrm>
+          <a:prstGeom prst="rect">
+            <a:avLst/>
+          </a:prstGeom>
+          <a:noFill/>
+        </p:spPr>
+        <p:txBody>
+          <a:bodyPr wrap="square">
+            <a:spAutoFit/>
+          </a:bodyPr>
+          <a:lstStyle/>
+          <a:p>
+            <a:pPr algn="l">
+              <a:defRPr sz="1200">
+                <a:solidFill>
+                  <a:srgbClr val="666666"/>
+                </a:solidFill>
+              </a:defRPr>
+            </a:pPr>
+            <a:r>
+              <a:t>架构选择依据：单体架构下所有模块打包在同一进程中，局部改动需全局重新部署。微服务架构将业务拆分为独立服务，各服务通过 Nacos 按服务名寻址，实例增减对上游透明。共享 MySQL 是当前业务体量下的折中方案——避免过早引入分布式事务，保留未来按表拆库的能力。</a:t>
+            </a:r>
+          </a:p>
+        </p:txBody>
+      </p:sp>
     </p:spTree>
   </p:cSld>
   <p:clrMapOvr>
@@ -11071,6 +11211,76 @@
             </a:pPr>
             <a:r>
               <a:t>通知 3 + 搜索 1 + 媒体 2</a:t>
+            </a:r>
+          </a:p>
+        </p:txBody>
+      </p:sp>
+      <p:sp>
+        <p:nvSpPr>
+          <p:cNvPr id="82" name="TextBox 81"/>
+          <p:cNvSpPr txBox="1"/>
+          <p:nvPr/>
+        </p:nvSpPr>
+        <p:spPr>
+          <a:xfrm>
+            <a:off x="457200" y="5029200"/>
+            <a:ext cx="5486400" cy="1097280"/>
+          </a:xfrm>
+          <a:prstGeom prst="rect">
+            <a:avLst/>
+          </a:prstGeom>
+          <a:noFill/>
+        </p:spPr>
+        <p:txBody>
+          <a:bodyPr wrap="square">
+            <a:spAutoFit/>
+          </a:bodyPr>
+          <a:lstStyle/>
+          <a:p>
+            <a:pPr algn="l">
+              <a:defRPr sz="1100">
+                <a:solidFill>
+                  <a:srgbClr val="666666"/>
+                </a:solidFill>
+              </a:defRPr>
+            </a:pPr>
+            <a:r>
+              <a:t>forum_post 表冗余存储了 author_name 和 section_name，严格来说违反第三范式，但帖子列表是访问最频繁的接口，冗余存储使列表查询在单表上完成，省去三表 JOIN 开销。</a:t>
+            </a:r>
+          </a:p>
+        </p:txBody>
+      </p:sp>
+      <p:sp>
+        <p:nvSpPr>
+          <p:cNvPr id="83" name="TextBox 82"/>
+          <p:cNvSpPr txBox="1"/>
+          <p:nvPr/>
+        </p:nvSpPr>
+        <p:spPr>
+          <a:xfrm>
+            <a:off x="6400800" y="5029200"/>
+            <a:ext cx="5303520" cy="1097280"/>
+          </a:xfrm>
+          <a:prstGeom prst="rect">
+            <a:avLst/>
+          </a:prstGeom>
+          <a:noFill/>
+        </p:spPr>
+        <p:txBody>
+          <a:bodyPr wrap="square">
+            <a:spAutoFit/>
+          </a:bodyPr>
+          <a:lstStyle/>
+          <a:p>
+            <a:pPr algn="l">
+              <a:defRPr sz="1100">
+                <a:solidFill>
+                  <a:srgbClr val="666666"/>
+                </a:solidFill>
+              </a:defRPr>
+            </a:pPr>
+            <a:r>
+              <a:t>全部接口遵循 RESTful 风格，GET/POST/PUT/DELETE 对应读取/创建/更新/删除。网关维护公开接口白名单，白名单外的写操作接口要求携带有效 JWT 令牌。</a:t>
             </a:r>
           </a:p>
         </p:txBody>
